--- a/09-Terraform/Session1/09-Terraform-Foundations.pptx
+++ b/09-Terraform/Session1/09-Terraform-Foundations.pptx
@@ -7062,6 +7062,25 @@
               </a:rPr>
               <a:t>Reproducible: deploy identical environments (dev, qa, prod) instantly</a:t>
             </a:r>
+          </a:p>
+          <a:p>
+            <a:pPr marL="342900" indent="-342900">
+              <a:spcAft>
+                <a:spcPts val="1200"/>
+              </a:spcAft>
+              <a:buSzPct val="100000"/>
+              <a:buChar char="•"/>
+            </a:pPr>
+            <a:r>
+              <a:rPr lang="en-US" sz="1400" dirty="0">
+                <a:solidFill>
+                  <a:srgbClr val="3A4668"/>
+                </a:solidFill>
+                <a:latin typeface="Arial" pitchFamily="34" charset="0"/>
+                <a:cs typeface="Arial" pitchFamily="34" charset="-120"/>
+              </a:rPr>
+              <a:t>Idempotent:  One code, if executed multiple times, produce same result, if I write a code for create 1 ec2 server of type t4g.small.. And I run the code 10 times… then also, only 1 ec2 will be created..</a:t>
+            </a:r>
             <a:endParaRPr lang="en-US" sz="1400" dirty="0"/>
           </a:p>
         </p:txBody>
@@ -7542,6 +7561,35 @@
                 <a:cs typeface="Arial" pitchFamily="34" charset="-120"/>
               </a:rPr>
               <a:t>CloudFormation: AWS-only</a:t>
+            </a:r>
+          </a:p>
+          <a:p>
+            <a:pPr marL="342900" indent="-342900">
+              <a:spcAft>
+                <a:spcPts val="800"/>
+              </a:spcAft>
+              <a:buSzPct val="100000"/>
+              <a:buChar char="•"/>
+            </a:pPr>
+            <a:r>
+              <a:rPr lang="en-US" sz="1300" dirty="0">
+                <a:solidFill>
+                  <a:srgbClr val="3A4668"/>
+                </a:solidFill>
+                <a:latin typeface="Arial" pitchFamily="34" charset="0"/>
+                <a:cs typeface="Arial" pitchFamily="34" charset="-120"/>
+              </a:rPr>
+              <a:t>ARM templates / Biceps</a:t>
+            </a:r>
+            <a:r>
+              <a:rPr lang="en-US" sz="1300">
+                <a:solidFill>
+                  <a:srgbClr val="3A4668"/>
+                </a:solidFill>
+                <a:latin typeface="Arial" pitchFamily="34" charset="0"/>
+                <a:cs typeface="Arial" pitchFamily="34" charset="-120"/>
+              </a:rPr>
+              <a:t>: Azure-only</a:t>
             </a:r>
             <a:endParaRPr lang="en-US" sz="1300" dirty="0"/>
           </a:p>
